--- a/doc/スライド.pptx
+++ b/doc/スライド.pptx
@@ -29,7 +29,7 @@
     <p:sldId id="366" r:id="rId20"/>
     <p:sldId id="363" r:id="rId21"/>
     <p:sldId id="368" r:id="rId22"/>
-    <p:sldId id="367" r:id="rId23"/>
+    <p:sldId id="380" r:id="rId23"/>
     <p:sldId id="369" r:id="rId24"/>
     <p:sldId id="370" r:id="rId25"/>
     <p:sldId id="371" r:id="rId26"/>
@@ -5012,7 +5012,7 @@
           <a:p>
             <a:fld id="{0DC994AA-C437-4EF4-8BEF-0B832D7FA420}" type="datetimeFigureOut">
               <a:rPr lang="en-US" smtClean="0"/>
-              <a:t>8/18/2026</a:t>
+              <a:t>8/19/2026</a:t>
             </a:fld>
             <a:endParaRPr lang="en-US" dirty="0"/>
           </a:p>
@@ -5189,7 +5189,7 @@
           <a:p>
             <a:fld id="{FB20CE03-6C3A-EB4D-A9B1-7EFD38B58412}" type="datetimeFigureOut">
               <a:rPr lang="en-US" smtClean="0"/>
-              <a:t>8/18/2026</a:t>
+              <a:t>8/19/2026</a:t>
             </a:fld>
             <a:endParaRPr lang="en-US" dirty="0"/>
           </a:p>
@@ -35061,8 +35061,8 @@
           </a:p>
         </p:txBody>
       </p:sp>
-      <mc:AlternateContent xmlns:mc="http://schemas.openxmlformats.org/markup-compatibility/2006" xmlns:a14="http://schemas.microsoft.com/office/drawing/2010/main">
-        <mc:Choice Requires="a14">
+      <mc:AlternateContent xmlns:mc="http://schemas.openxmlformats.org/markup-compatibility/2006">
+        <mc:Choice xmlns:a14="http://schemas.microsoft.com/office/drawing/2010/main" Requires="a14">
           <p:sp>
             <p:nvSpPr>
               <p:cNvPr id="3" name="Text Placeholder 2">
@@ -35421,19 +35421,23 @@
                   <a:t> に動くとチーズまでの距離が短くなるため、</a:t>
                 </a:r>
                 <a:r>
-                  <a:rPr lang="en-US" altLang="ja-JP" spc="-150" dirty="0"/>
+                  <a:rPr lang="en-US" altLang="ja-JP" b="1" spc="-150" dirty="0"/>
                   <a:t>Q</a:t>
                 </a:r>
                 <a:r>
+                  <a:rPr lang="ja-JP" altLang="en-US" b="1" spc="-150" dirty="0"/>
+                  <a:t>値が上がる</a:t>
+                </a:r>
+                <a:r>
                   <a:rPr lang="ja-JP" altLang="en-US" spc="-150" dirty="0"/>
-                  <a:t>値が上がる。</a:t>
+                  <a:t>。</a:t>
                 </a:r>
                 <a:endParaRPr lang="en-US" spc="-150" dirty="0"/>
               </a:p>
             </p:txBody>
           </p:sp>
         </mc:Choice>
-        <mc:Fallback xmlns="">
+        <mc:Fallback>
           <p:sp>
             <p:nvSpPr>
               <p:cNvPr id="3" name="Text Placeholder 2">
@@ -36927,193 +36931,321 @@
           </a:p>
         </p:txBody>
       </p:sp>
-      <p:sp>
-        <p:nvSpPr>
-          <p:cNvPr id="82" name="Speech Bubble: Rectangle with Corners Rounded 81">
-            <a:extLst>
-              <a:ext uri="{FF2B5EF4-FFF2-40B4-BE49-F238E27FC236}">
-                <a16:creationId xmlns:a16="http://schemas.microsoft.com/office/drawing/2014/main" id="{4F5FD394-EA07-0B4A-8399-EEFD6DF67799}"/>
-              </a:ext>
-            </a:extLst>
-          </p:cNvPr>
-          <p:cNvSpPr/>
-          <p:nvPr/>
-        </p:nvSpPr>
-        <p:spPr>
-          <a:xfrm>
-            <a:off x="4185735" y="2295686"/>
-            <a:ext cx="2226140" cy="1723411"/>
-          </a:xfrm>
-          <a:prstGeom prst="wedgeRoundRectCallout">
-            <a:avLst>
-              <a:gd name="adj1" fmla="val -60696"/>
-              <a:gd name="adj2" fmla="val -22907"/>
-              <a:gd name="adj3" fmla="val 16667"/>
-            </a:avLst>
-          </a:prstGeom>
-          <a:solidFill>
-            <a:schemeClr val="bg1"/>
-          </a:solidFill>
-          <a:ln w="28575">
-            <a:solidFill>
-              <a:srgbClr val="2BC2B4"/>
-            </a:solidFill>
-          </a:ln>
-        </p:spPr>
-        <p:style>
-          <a:lnRef idx="2">
-            <a:schemeClr val="accent1">
-              <a:shade val="15000"/>
-            </a:schemeClr>
-          </a:lnRef>
-          <a:fillRef idx="1">
-            <a:schemeClr val="accent1"/>
-          </a:fillRef>
-          <a:effectRef idx="0">
-            <a:schemeClr val="accent1"/>
-          </a:effectRef>
-          <a:fontRef idx="minor">
-            <a:schemeClr val="lt1"/>
-          </a:fontRef>
-        </p:style>
-        <p:txBody>
-          <a:bodyPr rtlCol="0" anchor="ctr"/>
-          <a:lstStyle/>
-          <a:p>
-            <a:pPr algn="just"/>
-            <a:r>
-              <a:rPr lang="ja-JP" altLang="en-US" sz="1600" dirty="0">
+      <mc:AlternateContent xmlns:mc="http://schemas.openxmlformats.org/markup-compatibility/2006">
+        <mc:Choice xmlns:a14="http://schemas.microsoft.com/office/drawing/2010/main" Requires="a14">
+          <p:sp>
+            <p:nvSpPr>
+              <p:cNvPr id="82" name="Speech Bubble: Rectangle with Corners Rounded 81">
+                <a:extLst>
+                  <a:ext uri="{FF2B5EF4-FFF2-40B4-BE49-F238E27FC236}">
+                    <a16:creationId xmlns:a16="http://schemas.microsoft.com/office/drawing/2014/main" id="{4F5FD394-EA07-0B4A-8399-EEFD6DF67799}"/>
+                  </a:ext>
+                </a:extLst>
+              </p:cNvPr>
+              <p:cNvSpPr/>
+              <p:nvPr/>
+            </p:nvSpPr>
+            <p:spPr>
+              <a:xfrm>
+                <a:off x="4185735" y="2295686"/>
+                <a:ext cx="2493306" cy="1723411"/>
+              </a:xfrm>
+              <a:prstGeom prst="wedgeRoundRectCallout">
+                <a:avLst>
+                  <a:gd name="adj1" fmla="val -60696"/>
+                  <a:gd name="adj2" fmla="val -22907"/>
+                  <a:gd name="adj3" fmla="val 16667"/>
+                </a:avLst>
+              </a:prstGeom>
+              <a:solidFill>
+                <a:schemeClr val="bg1"/>
+              </a:solidFill>
+              <a:ln w="28575">
                 <a:solidFill>
-                  <a:schemeClr val="tx1"/>
+                  <a:srgbClr val="2BC2B4"/>
                 </a:solidFill>
-              </a:rPr>
-              <a:t>次のマスで選べる行動の高い</a:t>
-            </a:r>
-            <a:r>
-              <a:rPr lang="en-US" altLang="ja-JP" sz="1600" dirty="0">
+              </a:ln>
+            </p:spPr>
+            <p:style>
+              <a:lnRef idx="2">
+                <a:schemeClr val="accent1">
+                  <a:shade val="15000"/>
+                </a:schemeClr>
+              </a:lnRef>
+              <a:fillRef idx="1">
+                <a:schemeClr val="accent1"/>
+              </a:fillRef>
+              <a:effectRef idx="0">
+                <a:schemeClr val="accent1"/>
+              </a:effectRef>
+              <a:fontRef idx="minor">
+                <a:schemeClr val="lt1"/>
+              </a:fontRef>
+            </p:style>
+            <p:txBody>
+              <a:bodyPr rtlCol="0" anchor="ctr"/>
+              <a:lstStyle/>
+              <a:p>
+                <a:pPr algn="just"/>
+                <a:r>
+                  <a:rPr lang="ja-JP" altLang="en-US" sz="1600" dirty="0">
+                    <a:solidFill>
+                      <a:schemeClr val="tx1"/>
+                    </a:solidFill>
+                  </a:rPr>
+                  <a:t>次</a:t>
+                </a:r>
+                <a:r>
+                  <a:rPr lang="en-US" altLang="ja-JP" sz="1600" dirty="0">
+                    <a:solidFill>
+                      <a:schemeClr val="tx1"/>
+                    </a:solidFill>
+                  </a:rPr>
+                  <a:t>(</a:t>
+                </a:r>
+                <a14:m>
+                  <m:oMath xmlns:m="http://schemas.openxmlformats.org/officeDocument/2006/math">
+                    <m:sSub>
+                      <m:sSubPr>
+                        <m:ctrlPr>
+                          <a:rPr lang="en-US" altLang="ja-JP" sz="1600" b="0" i="1" smtClean="0">
+                            <a:solidFill>
+                              <a:schemeClr val="tx1"/>
+                            </a:solidFill>
+                            <a:latin typeface="Cambria Math" panose="02040503050406030204" pitchFamily="18" charset="0"/>
+                          </a:rPr>
+                        </m:ctrlPr>
+                      </m:sSubPr>
+                      <m:e>
+                        <m:r>
+                          <a:rPr lang="en-US" altLang="ja-JP" sz="1600" b="0" i="1" smtClean="0">
+                            <a:solidFill>
+                              <a:schemeClr val="tx1"/>
+                            </a:solidFill>
+                            <a:latin typeface="Cambria Math" panose="02040503050406030204" pitchFamily="18" charset="0"/>
+                          </a:rPr>
+                          <m:t>𝑠</m:t>
+                        </m:r>
+                      </m:e>
+                      <m:sub>
+                        <m:r>
+                          <a:rPr lang="en-US" altLang="ja-JP" sz="1600" b="0" i="1" smtClean="0">
+                            <a:solidFill>
+                              <a:schemeClr val="tx1"/>
+                            </a:solidFill>
+                            <a:latin typeface="Cambria Math" panose="02040503050406030204" pitchFamily="18" charset="0"/>
+                          </a:rPr>
+                          <m:t>𝑡</m:t>
+                        </m:r>
+                        <m:r>
+                          <a:rPr lang="en-US" altLang="ja-JP" sz="1600" b="0" i="1" smtClean="0">
+                            <a:solidFill>
+                              <a:schemeClr val="tx1"/>
+                            </a:solidFill>
+                            <a:latin typeface="Cambria Math" panose="02040503050406030204" pitchFamily="18" charset="0"/>
+                          </a:rPr>
+                          <m:t>+1</m:t>
+                        </m:r>
+                      </m:sub>
+                    </m:sSub>
+                  </m:oMath>
+                </a14:m>
+                <a:r>
+                  <a:rPr lang="en-US" altLang="ja-JP" sz="1600" dirty="0">
+                    <a:solidFill>
+                      <a:schemeClr val="tx1"/>
+                    </a:solidFill>
+                  </a:rPr>
+                  <a:t>)</a:t>
+                </a:r>
+                <a:r>
+                  <a:rPr lang="ja-JP" altLang="en-US" sz="1600" dirty="0">
+                    <a:solidFill>
+                      <a:schemeClr val="tx1"/>
+                    </a:solidFill>
+                  </a:rPr>
+                  <a:t>のマスで選べる行動の高い</a:t>
+                </a:r>
+                <a:r>
+                  <a:rPr lang="en-US" altLang="ja-JP" sz="1600" dirty="0">
+                    <a:solidFill>
+                      <a:schemeClr val="tx1"/>
+                    </a:solidFill>
+                  </a:rPr>
+                  <a:t>Q</a:t>
+                </a:r>
+                <a:r>
+                  <a:rPr lang="ja-JP" altLang="en-US" sz="1600" dirty="0">
+                    <a:solidFill>
+                      <a:schemeClr val="tx1"/>
+                    </a:solidFill>
+                  </a:rPr>
+                  <a:t>値は：</a:t>
+                </a:r>
+                <a:endParaRPr lang="en-US" altLang="ja-JP" sz="1600" dirty="0">
+                  <a:solidFill>
+                    <a:schemeClr val="tx1"/>
+                  </a:solidFill>
+                </a:endParaRPr>
+              </a:p>
+              <a:p>
+                <a:pPr marL="285750" indent="-285750" algn="just">
+                  <a:buFont typeface="Arial" panose="020B0604020202020204" pitchFamily="34" charset="0"/>
+                  <a:buChar char="•"/>
+                </a:pPr>
+                <a:r>
+                  <a:rPr lang="ja-JP" altLang="en-US" sz="1600" dirty="0">
+                    <a:solidFill>
+                      <a:schemeClr val="tx1"/>
+                    </a:solidFill>
+                  </a:rPr>
+                  <a:t>上 </a:t>
+                </a:r>
+                <a:r>
+                  <a:rPr lang="en-US" altLang="ja-JP" sz="1600" dirty="0">
+                    <a:solidFill>
+                      <a:schemeClr val="tx1"/>
+                    </a:solidFill>
+                  </a:rPr>
+                  <a:t>= 1</a:t>
+                </a:r>
+              </a:p>
+              <a:p>
+                <a:pPr marL="285750" indent="-285750" algn="just">
+                  <a:buFont typeface="Arial" panose="020B0604020202020204" pitchFamily="34" charset="0"/>
+                  <a:buChar char="•"/>
+                </a:pPr>
+                <a:r>
+                  <a:rPr lang="ja-JP" altLang="en-US" sz="1600" dirty="0">
+                    <a:solidFill>
+                      <a:schemeClr val="tx1"/>
+                    </a:solidFill>
+                  </a:rPr>
+                  <a:t>下 </a:t>
+                </a:r>
+                <a:r>
+                  <a:rPr lang="en-US" altLang="ja-JP" sz="1600" dirty="0">
+                    <a:solidFill>
+                      <a:schemeClr val="tx1"/>
+                    </a:solidFill>
+                  </a:rPr>
+                  <a:t>= 3</a:t>
+                </a:r>
+              </a:p>
+              <a:p>
+                <a:pPr marL="285750" indent="-285750" algn="just">
+                  <a:buFont typeface="Arial" panose="020B0604020202020204" pitchFamily="34" charset="0"/>
+                  <a:buChar char="•"/>
+                </a:pPr>
+                <a:r>
+                  <a:rPr lang="ja-JP" altLang="en-US" sz="1600" dirty="0">
+                    <a:solidFill>
+                      <a:schemeClr val="tx1"/>
+                    </a:solidFill>
+                  </a:rPr>
+                  <a:t>右 </a:t>
+                </a:r>
+                <a:r>
+                  <a:rPr lang="en-US" altLang="ja-JP" sz="1600" dirty="0">
+                    <a:solidFill>
+                      <a:schemeClr val="tx1"/>
+                    </a:solidFill>
+                  </a:rPr>
+                  <a:t>= </a:t>
+                </a:r>
+                <a:r>
+                  <a:rPr lang="en-US" altLang="ja-JP" sz="1600" dirty="0">
+                    <a:solidFill>
+                      <a:srgbClr val="9751CB"/>
+                    </a:solidFill>
+                  </a:rPr>
+                  <a:t>5</a:t>
+                </a:r>
+              </a:p>
+              <a:p>
+                <a:pPr marL="285750" indent="-285750" algn="just">
+                  <a:buFont typeface="Arial" panose="020B0604020202020204" pitchFamily="34" charset="0"/>
+                  <a:buChar char="•"/>
+                </a:pPr>
+                <a:r>
+                  <a:rPr lang="ja-JP" altLang="en-US" sz="1600" dirty="0">
+                    <a:solidFill>
+                      <a:schemeClr val="tx1"/>
+                    </a:solidFill>
+                  </a:rPr>
+                  <a:t>左 </a:t>
+                </a:r>
+                <a:r>
+                  <a:rPr lang="en-US" altLang="ja-JP" sz="1600" dirty="0">
+                    <a:solidFill>
+                      <a:schemeClr val="tx1"/>
+                    </a:solidFill>
+                  </a:rPr>
+                  <a:t>= 2</a:t>
+                </a:r>
+                <a:endParaRPr lang="ja-JP" altLang="en-US" sz="1600" dirty="0">
+                  <a:solidFill>
+                    <a:schemeClr val="tx1"/>
+                  </a:solidFill>
+                </a:endParaRPr>
+              </a:p>
+            </p:txBody>
+          </p:sp>
+        </mc:Choice>
+        <mc:Fallback>
+          <p:sp>
+            <p:nvSpPr>
+              <p:cNvPr id="82" name="Speech Bubble: Rectangle with Corners Rounded 81">
+                <a:extLst>
+                  <a:ext uri="{FF2B5EF4-FFF2-40B4-BE49-F238E27FC236}">
+                    <a16:creationId xmlns:a16="http://schemas.microsoft.com/office/drawing/2014/main" id="{4F5FD394-EA07-0B4A-8399-EEFD6DF67799}"/>
+                  </a:ext>
+                </a:extLst>
+              </p:cNvPr>
+              <p:cNvSpPr>
+                <a:spLocks noRot="1" noChangeAspect="1" noMove="1" noResize="1" noEditPoints="1" noAdjustHandles="1" noChangeArrowheads="1" noChangeShapeType="1" noTextEdit="1"/>
+              </p:cNvSpPr>
+              <p:nvPr/>
+            </p:nvSpPr>
+            <p:spPr>
+              <a:xfrm>
+                <a:off x="4185735" y="2295686"/>
+                <a:ext cx="2493306" cy="1723411"/>
+              </a:xfrm>
+              <a:prstGeom prst="wedgeRoundRectCallout">
+                <a:avLst>
+                  <a:gd name="adj1" fmla="val -60696"/>
+                  <a:gd name="adj2" fmla="val -22907"/>
+                  <a:gd name="adj3" fmla="val 16667"/>
+                </a:avLst>
+              </a:prstGeom>
+              <a:blipFill>
+                <a:blip r:embed="rId11"/>
+                <a:stretch>
+                  <a:fillRect/>
+                </a:stretch>
+              </a:blipFill>
+              <a:ln w="28575">
                 <a:solidFill>
-                  <a:schemeClr val="tx1"/>
+                  <a:srgbClr val="2BC2B4"/>
                 </a:solidFill>
-              </a:rPr>
-              <a:t>Q</a:t>
-            </a:r>
-            <a:r>
-              <a:rPr lang="ja-JP" altLang="en-US" sz="1600" dirty="0">
-                <a:solidFill>
-                  <a:schemeClr val="tx1"/>
-                </a:solidFill>
-              </a:rPr>
-              <a:t>値は：</a:t>
-            </a:r>
-            <a:endParaRPr lang="en-US" altLang="ja-JP" sz="1600" dirty="0">
-              <a:solidFill>
-                <a:schemeClr val="tx1"/>
-              </a:solidFill>
-            </a:endParaRPr>
-          </a:p>
-          <a:p>
-            <a:pPr marL="285750" indent="-285750" algn="just">
-              <a:buFont typeface="Arial" panose="020B0604020202020204" pitchFamily="34" charset="0"/>
-              <a:buChar char="•"/>
-            </a:pPr>
-            <a:r>
-              <a:rPr lang="ja-JP" altLang="en-US" sz="1600" dirty="0">
-                <a:solidFill>
-                  <a:schemeClr val="tx1"/>
-                </a:solidFill>
-              </a:rPr>
-              <a:t>上 </a:t>
-            </a:r>
-            <a:r>
-              <a:rPr lang="en-US" altLang="ja-JP" sz="1600" dirty="0">
-                <a:solidFill>
-                  <a:schemeClr val="tx1"/>
-                </a:solidFill>
-              </a:rPr>
-              <a:t>= 1</a:t>
-            </a:r>
-          </a:p>
-          <a:p>
-            <a:pPr marL="285750" indent="-285750" algn="just">
-              <a:buFont typeface="Arial" panose="020B0604020202020204" pitchFamily="34" charset="0"/>
-              <a:buChar char="•"/>
-            </a:pPr>
-            <a:r>
-              <a:rPr lang="ja-JP" altLang="en-US" sz="1600" dirty="0">
-                <a:solidFill>
-                  <a:schemeClr val="tx1"/>
-                </a:solidFill>
-              </a:rPr>
-              <a:t>下 </a:t>
-            </a:r>
-            <a:r>
-              <a:rPr lang="en-US" altLang="ja-JP" sz="1600" dirty="0">
-                <a:solidFill>
-                  <a:schemeClr val="tx1"/>
-                </a:solidFill>
-              </a:rPr>
-              <a:t>= 3</a:t>
-            </a:r>
-          </a:p>
-          <a:p>
-            <a:pPr marL="285750" indent="-285750" algn="just">
-              <a:buFont typeface="Arial" panose="020B0604020202020204" pitchFamily="34" charset="0"/>
-              <a:buChar char="•"/>
-            </a:pPr>
-            <a:r>
-              <a:rPr lang="ja-JP" altLang="en-US" sz="1600" dirty="0">
-                <a:solidFill>
-                  <a:schemeClr val="tx1"/>
-                </a:solidFill>
-              </a:rPr>
-              <a:t>右 </a:t>
-            </a:r>
-            <a:r>
-              <a:rPr lang="en-US" altLang="ja-JP" sz="1600" dirty="0">
-                <a:solidFill>
-                  <a:schemeClr val="tx1"/>
-                </a:solidFill>
-              </a:rPr>
-              <a:t>= </a:t>
-            </a:r>
-            <a:r>
-              <a:rPr lang="en-US" altLang="ja-JP" sz="1600" dirty="0">
-                <a:solidFill>
-                  <a:srgbClr val="9751CB"/>
-                </a:solidFill>
-              </a:rPr>
-              <a:t>5</a:t>
-            </a:r>
-          </a:p>
-          <a:p>
-            <a:pPr marL="285750" indent="-285750" algn="just">
-              <a:buFont typeface="Arial" panose="020B0604020202020204" pitchFamily="34" charset="0"/>
-              <a:buChar char="•"/>
-            </a:pPr>
-            <a:r>
-              <a:rPr lang="ja-JP" altLang="en-US" sz="1600" dirty="0">
-                <a:solidFill>
-                  <a:schemeClr val="tx1"/>
-                </a:solidFill>
-              </a:rPr>
-              <a:t>左 </a:t>
-            </a:r>
-            <a:r>
-              <a:rPr lang="en-US" altLang="ja-JP" sz="1600" dirty="0">
-                <a:solidFill>
-                  <a:schemeClr val="tx1"/>
-                </a:solidFill>
-              </a:rPr>
-              <a:t>= 2</a:t>
-            </a:r>
-            <a:endParaRPr lang="ja-JP" altLang="en-US" sz="1600" dirty="0">
-              <a:solidFill>
-                <a:schemeClr val="tx1"/>
-              </a:solidFill>
-            </a:endParaRPr>
-          </a:p>
-        </p:txBody>
-      </p:sp>
+              </a:ln>
+            </p:spPr>
+            <p:txBody>
+              <a:bodyPr/>
+              <a:lstStyle/>
+              <a:p>
+                <a:r>
+                  <a:rPr lang="en-US">
+                    <a:noFill/>
+                  </a:rPr>
+                  <a:t> </a:t>
+                </a:r>
+              </a:p>
+            </p:txBody>
+          </p:sp>
+        </mc:Fallback>
+      </mc:AlternateContent>
       <p:sp>
         <p:nvSpPr>
           <p:cNvPr id="39" name="TextBox 38">
@@ -37128,7 +37260,7 @@
         </p:nvSpPr>
         <p:spPr>
           <a:xfrm>
-            <a:off x="6679041" y="3351974"/>
+            <a:off x="7173894" y="3351974"/>
             <a:ext cx="1600667" cy="369332"/>
           </a:xfrm>
           <a:prstGeom prst="rect">
@@ -37191,8 +37323,8 @@
         </p:nvCxnSpPr>
         <p:spPr>
           <a:xfrm flipH="1">
-            <a:off x="5358241" y="3536640"/>
-            <a:ext cx="1320800" cy="0"/>
+            <a:off x="5289748" y="3536640"/>
+            <a:ext cx="1884146" cy="0"/>
           </a:xfrm>
           <a:prstGeom prst="straightConnector1">
             <a:avLst/>
@@ -37274,7 +37406,7 @@
     </p:spTree>
     <p:extLst>
       <p:ext uri="{BB962C8B-B14F-4D97-AF65-F5344CB8AC3E}">
-        <p14:creationId xmlns:p14="http://schemas.microsoft.com/office/powerpoint/2010/main" val="1522849761"/>
+        <p14:creationId xmlns:p14="http://schemas.microsoft.com/office/powerpoint/2010/main" val="2523321702"/>
       </p:ext>
     </p:extLst>
   </p:cSld>
@@ -48331,15 +48463,6 @@
 </file>
 
 <file path=customXml/item2.xml><?xml version="1.0" encoding="utf-8"?>
-<?mso-contentType ?>
-<FormTemplates xmlns="http://schemas.microsoft.com/sharepoint/v3/contenttype/forms">
-  <Display>DocumentLibraryForm</Display>
-  <Edit>DocumentLibraryForm</Edit>
-  <New>DocumentLibraryForm</New>
-</FormTemplates>
-</file>
-
-<file path=customXml/item3.xml><?xml version="1.0" encoding="utf-8"?>
 <p:properties xmlns:p="http://schemas.microsoft.com/office/2006/metadata/properties" xmlns:xsi="http://www.w3.org/2001/XMLSchema-instance" xmlns:pc="http://schemas.microsoft.com/office/infopath/2007/PartnerControls">
   <documentManagement>
     <_ip_UnifiedCompliancePolicyUIAction xmlns="http://schemas.microsoft.com/sharepoint/v3" xsi:nil="true"/>
@@ -48357,6 +48480,15 @@
     <MediaServiceKeyPoints xmlns="71af3243-3dd4-4a8d-8c0d-dd76da1f02a5" xsi:nil="true"/>
   </documentManagement>
 </p:properties>
+</file>
+
+<file path=customXml/item3.xml><?xml version="1.0" encoding="utf-8"?>
+<?mso-contentType ?>
+<FormTemplates xmlns="http://schemas.microsoft.com/sharepoint/v3/contenttype/forms">
+  <Display>DocumentLibraryForm</Display>
+  <Edit>DocumentLibraryForm</Edit>
+  <New>DocumentLibraryForm</New>
+</FormTemplates>
 </file>
 
 <file path=customXml/itemProps1.xml><?xml version="1.0" encoding="utf-8"?>
@@ -48381,14 +48513,6 @@
 </file>
 
 <file path=customXml/itemProps2.xml><?xml version="1.0" encoding="utf-8"?>
-<ds:datastoreItem xmlns:ds="http://schemas.openxmlformats.org/officeDocument/2006/customXml" ds:itemID="{67FFD73E-D96B-4428-99CD-717A4897D3B4}">
-  <ds:schemaRefs>
-    <ds:schemaRef ds:uri="http://schemas.microsoft.com/sharepoint/v3/contenttype/forms"/>
-  </ds:schemaRefs>
-</ds:datastoreItem>
-</file>
-
-<file path=customXml/itemProps3.xml><?xml version="1.0" encoding="utf-8"?>
 <ds:datastoreItem xmlns:ds="http://schemas.openxmlformats.org/officeDocument/2006/customXml" ds:itemID="{A3165DE6-2DCE-44FC-94B7-A499559DBF88}">
   <ds:schemaRefs>
     <ds:schemaRef ds:uri="http://purl.org/dc/terms/"/>
@@ -48407,6 +48531,14 @@
 </ds:datastoreItem>
 </file>
 
+<file path=customXml/itemProps3.xml><?xml version="1.0" encoding="utf-8"?>
+<ds:datastoreItem xmlns:ds="http://schemas.openxmlformats.org/officeDocument/2006/customXml" ds:itemID="{67FFD73E-D96B-4428-99CD-717A4897D3B4}">
+  <ds:schemaRefs>
+    <ds:schemaRef ds:uri="http://schemas.microsoft.com/sharepoint/v3/contenttype/forms"/>
+  </ds:schemaRefs>
+</ds:datastoreItem>
+</file>
+
 <file path=docMetadata/LabelInfo.xml><?xml version="1.0" encoding="utf-8"?>
 <clbl:labelList xmlns:clbl="http://schemas.microsoft.com/office/2020/mipLabelMetadata">
   <clbl:label id="{72fe835d-5e95-4512-8ae0-a7b38af25fc8}" enabled="0" method="" siteId="{72fe835d-5e95-4512-8ae0-a7b38af25fc8}" removed="1"/>
